--- a/protected-downloads/praesentation/VA09.pptx
+++ b/protected-downloads/praesentation/VA09.pptx
@@ -4532,7 +4532,7 @@
                 </a:solidFill>
                 <a:latin typeface="Arial"/>
               </a:rPr>
-              <a:t>v0.1</a:t>
+              <a:t>v1.0</a:t>
             </a:r>
           </a:p>
         </p:txBody>
